--- a/docu/poster_Gruppe_4.pptx
+++ b/docu/poster_Gruppe_4.pptx
@@ -269,7 +269,7 @@
           <a:p>
             <a:fld id="{F6C22954-707F-45A3-A81E-7C5EAFCF9BA8}" type="datetimeFigureOut">
               <a:rPr lang="en-DE" smtClean="0"/>
-              <a:t>13/07/2026</a:t>
+              <a:t>20/07/2026</a:t>
             </a:fld>
             <a:endParaRPr lang="en-DE"/>
           </a:p>
